--- a/Lesson_02/Занятие_02_Презентация.pptx
+++ b/Lesson_02/Занятие_02_Презентация.pptx
@@ -1947,6 +1947,36 @@
           </a:p>
         </p:txBody>
       </p:sp>
+      <p:pic>
+        <p:nvPicPr>
+          <p:cNvPr id="18" name="Рисунок 17">
+            <a:extLst>
+              <a:ext uri="{FF2B5EF4-FFF2-40B4-BE49-F238E27FC236}">
+                <a16:creationId xmlns:a16="http://schemas.microsoft.com/office/drawing/2014/main" id="{0AC53AD9-499A-C616-CB9E-8DD5BC93E3B4}"/>
+              </a:ext>
+            </a:extLst>
+          </p:cNvPr>
+          <p:cNvPicPr>
+            <a:picLocks noChangeAspect="1"/>
+          </p:cNvPicPr>
+          <p:nvPr/>
+        </p:nvPicPr>
+        <p:blipFill>
+          <a:blip r:embed="rId3"/>
+          <a:stretch>
+            <a:fillRect/>
+          </a:stretch>
+        </p:blipFill>
+        <p:spPr>
+          <a:xfrm>
+            <a:off x="8193199" y="0"/>
+            <a:ext cx="694769" cy="637050"/>
+          </a:xfrm>
+          <a:prstGeom prst="rect">
+            <a:avLst/>
+          </a:prstGeom>
+        </p:spPr>
+      </p:pic>
     </p:spTree>
   </p:cSld>
   <p:clrMapOvr>
@@ -3168,6 +3198,36 @@
           </a:p>
         </p:txBody>
       </p:sp>
+      <p:pic>
+        <p:nvPicPr>
+          <p:cNvPr id="39" name="Рисунок 38">
+            <a:extLst>
+              <a:ext uri="{FF2B5EF4-FFF2-40B4-BE49-F238E27FC236}">
+                <a16:creationId xmlns:a16="http://schemas.microsoft.com/office/drawing/2014/main" id="{0B084FE9-CEEC-A616-E43C-CE42E7F24D60}"/>
+              </a:ext>
+            </a:extLst>
+          </p:cNvPr>
+          <p:cNvPicPr>
+            <a:picLocks noChangeAspect="1"/>
+          </p:cNvPicPr>
+          <p:nvPr/>
+        </p:nvPicPr>
+        <p:blipFill>
+          <a:blip r:embed="rId3"/>
+          <a:stretch>
+            <a:fillRect/>
+          </a:stretch>
+        </p:blipFill>
+        <p:spPr>
+          <a:xfrm>
+            <a:off x="8193199" y="0"/>
+            <a:ext cx="694769" cy="637050"/>
+          </a:xfrm>
+          <a:prstGeom prst="rect">
+            <a:avLst/>
+          </a:prstGeom>
+        </p:spPr>
+      </p:pic>
     </p:spTree>
   </p:cSld>
   <p:clrMapOvr>
@@ -3363,7 +3423,7 @@
                   <a:srgbClr val="FFFFFF"/>
                 </a:solidFill>
               </a:rPr>
-              <a:t>ЗАНЯТИЕ 1 — БЫЛО</a:t>
+              <a:t>БЫЛО</a:t>
             </a:r>
             <a:endParaRPr lang="en-US" sz="1800" dirty="0"/>
           </a:p>
@@ -3819,12 +3879,12 @@
               <a:buNone/>
             </a:pPr>
             <a:r>
-              <a:rPr lang="en-US" sz="1800" b="1" dirty="0">
+              <a:rPr lang="en-US" sz="1800" b="1">
                 <a:solidFill>
                   <a:srgbClr val="FFFFFF"/>
                 </a:solidFill>
               </a:rPr>
-              <a:t>ЗАНЯТИЕ 2 — СТАНЕТ</a:t>
+              <a:t>СТАНЕТ</a:t>
             </a:r>
             <a:endParaRPr lang="en-US" sz="1800" dirty="0"/>
           </a:p>
@@ -4056,6 +4116,36 @@
           </a:p>
         </p:txBody>
       </p:sp>
+      <p:pic>
+        <p:nvPicPr>
+          <p:cNvPr id="25" name="Рисунок 24">
+            <a:extLst>
+              <a:ext uri="{FF2B5EF4-FFF2-40B4-BE49-F238E27FC236}">
+                <a16:creationId xmlns:a16="http://schemas.microsoft.com/office/drawing/2014/main" id="{F5CC88B3-19E7-F4D8-C291-1BB657261DFA}"/>
+              </a:ext>
+            </a:extLst>
+          </p:cNvPr>
+          <p:cNvPicPr>
+            <a:picLocks noChangeAspect="1"/>
+          </p:cNvPicPr>
+          <p:nvPr/>
+        </p:nvPicPr>
+        <p:blipFill>
+          <a:blip r:embed="rId3"/>
+          <a:stretch>
+            <a:fillRect/>
+          </a:stretch>
+        </p:blipFill>
+        <p:spPr>
+          <a:xfrm>
+            <a:off x="8193199" y="0"/>
+            <a:ext cx="694769" cy="637050"/>
+          </a:xfrm>
+          <a:prstGeom prst="rect">
+            <a:avLst/>
+          </a:prstGeom>
+        </p:spPr>
+      </p:pic>
     </p:spTree>
   </p:cSld>
   <p:clrMapOvr>
@@ -5451,6 +5541,36 @@
           </a:p>
         </p:txBody>
       </p:sp>
+      <p:pic>
+        <p:nvPicPr>
+          <p:cNvPr id="38" name="Рисунок 37">
+            <a:extLst>
+              <a:ext uri="{FF2B5EF4-FFF2-40B4-BE49-F238E27FC236}">
+                <a16:creationId xmlns:a16="http://schemas.microsoft.com/office/drawing/2014/main" id="{431EA25B-CD9F-04DA-9628-25BB7EA4BCB8}"/>
+              </a:ext>
+            </a:extLst>
+          </p:cNvPr>
+          <p:cNvPicPr>
+            <a:picLocks noChangeAspect="1"/>
+          </p:cNvPicPr>
+          <p:nvPr/>
+        </p:nvPicPr>
+        <p:blipFill>
+          <a:blip r:embed="rId3"/>
+          <a:stretch>
+            <a:fillRect/>
+          </a:stretch>
+        </p:blipFill>
+        <p:spPr>
+          <a:xfrm>
+            <a:off x="8193199" y="0"/>
+            <a:ext cx="694769" cy="637050"/>
+          </a:xfrm>
+          <a:prstGeom prst="rect">
+            <a:avLst/>
+          </a:prstGeom>
+        </p:spPr>
+      </p:pic>
     </p:spTree>
   </p:cSld>
   <p:clrMapOvr>
@@ -6756,6 +6876,36 @@
           </a:p>
         </p:txBody>
       </p:sp>
+      <p:pic>
+        <p:nvPicPr>
+          <p:cNvPr id="39" name="Рисунок 38">
+            <a:extLst>
+              <a:ext uri="{FF2B5EF4-FFF2-40B4-BE49-F238E27FC236}">
+                <a16:creationId xmlns:a16="http://schemas.microsoft.com/office/drawing/2014/main" id="{F189FA09-F793-896B-165E-72EBCAAFB215}"/>
+              </a:ext>
+            </a:extLst>
+          </p:cNvPr>
+          <p:cNvPicPr>
+            <a:picLocks noChangeAspect="1"/>
+          </p:cNvPicPr>
+          <p:nvPr/>
+        </p:nvPicPr>
+        <p:blipFill>
+          <a:blip r:embed="rId3"/>
+          <a:stretch>
+            <a:fillRect/>
+          </a:stretch>
+        </p:blipFill>
+        <p:spPr>
+          <a:xfrm>
+            <a:off x="8193199" y="0"/>
+            <a:ext cx="694769" cy="637050"/>
+          </a:xfrm>
+          <a:prstGeom prst="rect">
+            <a:avLst/>
+          </a:prstGeom>
+        </p:spPr>
+      </p:pic>
     </p:spTree>
   </p:cSld>
   <p:clrMapOvr>
@@ -8002,6 +8152,36 @@
           </a:p>
         </p:txBody>
       </p:sp>
+      <p:pic>
+        <p:nvPicPr>
+          <p:cNvPr id="38" name="Рисунок 37">
+            <a:extLst>
+              <a:ext uri="{FF2B5EF4-FFF2-40B4-BE49-F238E27FC236}">
+                <a16:creationId xmlns:a16="http://schemas.microsoft.com/office/drawing/2014/main" id="{58F76C41-EA91-6A60-64D2-DEE86F853B5F}"/>
+              </a:ext>
+            </a:extLst>
+          </p:cNvPr>
+          <p:cNvPicPr>
+            <a:picLocks noChangeAspect="1"/>
+          </p:cNvPicPr>
+          <p:nvPr/>
+        </p:nvPicPr>
+        <p:blipFill>
+          <a:blip r:embed="rId3"/>
+          <a:stretch>
+            <a:fillRect/>
+          </a:stretch>
+        </p:blipFill>
+        <p:spPr>
+          <a:xfrm>
+            <a:off x="8193199" y="0"/>
+            <a:ext cx="694769" cy="637050"/>
+          </a:xfrm>
+          <a:prstGeom prst="rect">
+            <a:avLst/>
+          </a:prstGeom>
+        </p:spPr>
+      </p:pic>
     </p:spTree>
   </p:cSld>
   <p:clrMapOvr>
@@ -9459,6 +9639,36 @@
           </a:p>
         </p:txBody>
       </p:sp>
+      <p:pic>
+        <p:nvPicPr>
+          <p:cNvPr id="42" name="Рисунок 41">
+            <a:extLst>
+              <a:ext uri="{FF2B5EF4-FFF2-40B4-BE49-F238E27FC236}">
+                <a16:creationId xmlns:a16="http://schemas.microsoft.com/office/drawing/2014/main" id="{BF30FB70-B2EC-4665-781A-AE613899F149}"/>
+              </a:ext>
+            </a:extLst>
+          </p:cNvPr>
+          <p:cNvPicPr>
+            <a:picLocks noChangeAspect="1"/>
+          </p:cNvPicPr>
+          <p:nvPr/>
+        </p:nvPicPr>
+        <p:blipFill>
+          <a:blip r:embed="rId3"/>
+          <a:stretch>
+            <a:fillRect/>
+          </a:stretch>
+        </p:blipFill>
+        <p:spPr>
+          <a:xfrm>
+            <a:off x="8193199" y="0"/>
+            <a:ext cx="694769" cy="637050"/>
+          </a:xfrm>
+          <a:prstGeom prst="rect">
+            <a:avLst/>
+          </a:prstGeom>
+        </p:spPr>
+      </p:pic>
     </p:spTree>
   </p:cSld>
   <p:clrMapOvr>
@@ -10841,6 +11051,36 @@
           </a:p>
         </p:txBody>
       </p:sp>
+      <p:pic>
+        <p:nvPicPr>
+          <p:cNvPr id="41" name="Рисунок 40">
+            <a:extLst>
+              <a:ext uri="{FF2B5EF4-FFF2-40B4-BE49-F238E27FC236}">
+                <a16:creationId xmlns:a16="http://schemas.microsoft.com/office/drawing/2014/main" id="{DEEE9BA2-50ED-D8BA-8BBF-0EB7F3C391D9}"/>
+              </a:ext>
+            </a:extLst>
+          </p:cNvPr>
+          <p:cNvPicPr>
+            <a:picLocks noChangeAspect="1"/>
+          </p:cNvPicPr>
+          <p:nvPr/>
+        </p:nvPicPr>
+        <p:blipFill>
+          <a:blip r:embed="rId3"/>
+          <a:stretch>
+            <a:fillRect/>
+          </a:stretch>
+        </p:blipFill>
+        <p:spPr>
+          <a:xfrm>
+            <a:off x="8193199" y="0"/>
+            <a:ext cx="694769" cy="637050"/>
+          </a:xfrm>
+          <a:prstGeom prst="rect">
+            <a:avLst/>
+          </a:prstGeom>
+        </p:spPr>
+      </p:pic>
     </p:spTree>
   </p:cSld>
   <p:clrMapOvr>
@@ -11601,6 +11841,36 @@
           </a:p>
         </p:txBody>
       </p:sp>
+      <p:pic>
+        <p:nvPicPr>
+          <p:cNvPr id="24" name="Рисунок 23">
+            <a:extLst>
+              <a:ext uri="{FF2B5EF4-FFF2-40B4-BE49-F238E27FC236}">
+                <a16:creationId xmlns:a16="http://schemas.microsoft.com/office/drawing/2014/main" id="{44AA7CBD-8014-8342-1246-63EF759FECD2}"/>
+              </a:ext>
+            </a:extLst>
+          </p:cNvPr>
+          <p:cNvPicPr>
+            <a:picLocks noChangeAspect="1"/>
+          </p:cNvPicPr>
+          <p:nvPr/>
+        </p:nvPicPr>
+        <p:blipFill>
+          <a:blip r:embed="rId3"/>
+          <a:stretch>
+            <a:fillRect/>
+          </a:stretch>
+        </p:blipFill>
+        <p:spPr>
+          <a:xfrm>
+            <a:off x="8193199" y="0"/>
+            <a:ext cx="694769" cy="637050"/>
+          </a:xfrm>
+          <a:prstGeom prst="rect">
+            <a:avLst/>
+          </a:prstGeom>
+        </p:spPr>
+      </p:pic>
     </p:spTree>
   </p:cSld>
   <p:clrMapOvr>
@@ -12440,6 +12710,36 @@
           </a:p>
         </p:txBody>
       </p:sp>
+      <p:pic>
+        <p:nvPicPr>
+          <p:cNvPr id="26" name="Рисунок 25">
+            <a:extLst>
+              <a:ext uri="{FF2B5EF4-FFF2-40B4-BE49-F238E27FC236}">
+                <a16:creationId xmlns:a16="http://schemas.microsoft.com/office/drawing/2014/main" id="{489D47B1-F72D-8E67-14D7-F92CCC59812D}"/>
+              </a:ext>
+            </a:extLst>
+          </p:cNvPr>
+          <p:cNvPicPr>
+            <a:picLocks noChangeAspect="1"/>
+          </p:cNvPicPr>
+          <p:nvPr/>
+        </p:nvPicPr>
+        <p:blipFill>
+          <a:blip r:embed="rId3"/>
+          <a:stretch>
+            <a:fillRect/>
+          </a:stretch>
+        </p:blipFill>
+        <p:spPr>
+          <a:xfrm>
+            <a:off x="8193199" y="0"/>
+            <a:ext cx="694769" cy="637050"/>
+          </a:xfrm>
+          <a:prstGeom prst="rect">
+            <a:avLst/>
+          </a:prstGeom>
+        </p:spPr>
+      </p:pic>
     </p:spTree>
   </p:cSld>
   <p:clrMapOvr>
